--- a/GDC_Lung_Cancer_Dataset_Scout_Demo.pptx
+++ b/GDC_Lung_Cancer_Dataset_Scout_Demo.pptx
@@ -115,6 +115,11 @@
       </a:defRPr>
     </a:lvl9pPr>
   </p:defaultTextStyle>
+  <p:extLst>
+    <p:ext uri="{EFAFB233-063F-42B5-8137-9DF3F51BA10A}">
+      <p15:sldGuideLst xmlns:p15="http://schemas.microsoft.com/office/powerpoint/2012/main"/>
+    </p:ext>
+  </p:extLst>
 </p:presentation>
 </file>
 
@@ -2130,64 +2135,6 @@
           <a:lstStyle/>
           <a:p>
             <a:endParaRPr lang="zh-TW" altLang="en-US"/>
-          </a:p>
-        </p:txBody>
-      </p:sp>
-      <p:sp>
-        <p:nvSpPr>
-          <p:cNvPr id="7" name="cover-meta">
-            <a:extLst>
-              <a:ext uri="{FF2B5EF4-FFF2-40B4-BE49-F238E27FC236}">
-                <a16:creationId xmlns:a16="http://schemas.microsoft.com/office/drawing/2014/main" id="{A38DFAF6-EB54-4C90-868A-B8C02DE5ABBB}"/>
-              </a:ext>
-            </a:extLst>
-          </p:cNvPr>
-          <p:cNvSpPr>
-            <a:spLocks noGrp="1"/>
-          </p:cNvSpPr>
-          <p:nvPr/>
-        </p:nvSpPr>
-        <p:spPr>
-          <a:xfrm>
-            <a:off x="647700" y="5842512"/>
-            <a:ext cx="6191250" cy="323850"/>
-          </a:xfrm>
-          <a:prstGeom prst="rect">
-            <a:avLst/>
-          </a:prstGeom>
-          <a:noFill/>
-          <a:ln w="0">
-            <a:noFill/>
-            <a:prstDash val="solid"/>
-          </a:ln>
-        </p:spPr>
-        <p:txBody>
-          <a:bodyPr anchor="t">
-            <a:normAutofit fontScale="99924" lnSpcReduction="10000"/>
-          </a:bodyPr>
-          <a:lstStyle/>
-          <a:p>
-            <a:pPr algn="l">
-              <a:defRPr sz="1650" b="1">
-                <a:solidFill>
-                  <a:srgbClr val="005EA8"/>
-                </a:solidFill>
-                <a:latin typeface="Microsoft JhengHei"/>
-                <a:ea typeface="Microsoft JhengHei"/>
-                <a:cs typeface="Microsoft JhengHei"/>
-              </a:defRPr>
-            </a:pPr>
-            <a:r>
-              <a:rPr sz="1650" b="1" dirty="0">
-                <a:solidFill>
-                  <a:srgbClr val="005EA8"/>
-                </a:solidFill>
-                <a:latin typeface="Microsoft JhengHei"/>
-                <a:ea typeface="Microsoft JhengHei"/>
-                <a:cs typeface="Microsoft JhengHei"/>
-              </a:rPr>
-              <a:t>TCGA-LUAD  ·  TCGA-LUSC  ·  5-minute demo</a:t>
-            </a:r>
           </a:p>
         </p:txBody>
       </p:sp>

--- a/GDC_Lung_Cancer_Dataset_Scout_Demo.pptx
+++ b/GDC_Lung_Cancer_Dataset_Scout_Demo.pptx
@@ -1843,7 +1843,7 @@
               </a:defRPr>
             </a:pPr>
             <a:r>
-              <a:rPr sz="1200" b="1">
+              <a:rPr sz="1200" b="1" dirty="0">
                 <a:solidFill>
                   <a:srgbClr val="005EA8"/>
                 </a:solidFill>
@@ -2341,8 +2341,18 @@
                 <a:ea typeface="Microsoft JhengHei"/>
                 <a:cs typeface="Microsoft JhengHei"/>
               </a:rPr>
-              <a:t> </a:t>
-            </a:r>
+              <a:t> metadata，</a:t>
+            </a:r>
+            <a:br>
+              <a:rPr lang="en-US" sz="2100" b="0" dirty="0">
+                <a:solidFill>
+                  <a:srgbClr val="5B6472"/>
+                </a:solidFill>
+                <a:latin typeface="Microsoft JhengHei"/>
+                <a:ea typeface="Microsoft JhengHei"/>
+                <a:cs typeface="Microsoft JhengHei"/>
+              </a:rPr>
+            </a:br>
             <a:r>
               <a:rPr sz="2100" b="0" dirty="0" err="1">
                 <a:solidFill>
@@ -2352,7 +2362,7 @@
                 <a:ea typeface="Microsoft JhengHei"/>
                 <a:cs typeface="Microsoft JhengHei"/>
               </a:rPr>
-              <a:t>metadata，判斷</a:t>
+              <a:t>判斷</a:t>
             </a:r>
             <a:r>
               <a:rPr sz="2100" b="0" dirty="0">
@@ -3074,7 +3084,7 @@
               </a:defRPr>
             </a:pPr>
             <a:r>
-              <a:rPr sz="2100" b="1">
+              <a:rPr sz="2100" b="1" dirty="0" err="1">
                 <a:solidFill>
                   <a:srgbClr val="005EA8"/>
                 </a:solidFill>
@@ -3082,7 +3092,62 @@
                 <a:ea typeface="Microsoft JhengHei"/>
                 <a:cs typeface="Microsoft JhengHei"/>
               </a:rPr>
-              <a:t>一個下午的 MVP：比較 2 個 cohort，輸出可檢查的 dataset fitness 結論。</a:t>
+              <a:t>比較</a:t>
+            </a:r>
+            <a:r>
+              <a:rPr sz="2100" b="1" dirty="0">
+                <a:solidFill>
+                  <a:srgbClr val="005EA8"/>
+                </a:solidFill>
+                <a:latin typeface="Microsoft JhengHei"/>
+                <a:ea typeface="Microsoft JhengHei"/>
+                <a:cs typeface="Microsoft JhengHei"/>
+              </a:rPr>
+              <a:t> 2 個 </a:t>
+            </a:r>
+            <a:r>
+              <a:rPr sz="2100" b="1" dirty="0" err="1">
+                <a:solidFill>
+                  <a:srgbClr val="005EA8"/>
+                </a:solidFill>
+                <a:latin typeface="Microsoft JhengHei"/>
+                <a:ea typeface="Microsoft JhengHei"/>
+                <a:cs typeface="Microsoft JhengHei"/>
+              </a:rPr>
+              <a:t>cohort，輸出可檢查的</a:t>
+            </a:r>
+            <a:r>
+              <a:rPr sz="2100" b="1" dirty="0">
+                <a:solidFill>
+                  <a:srgbClr val="005EA8"/>
+                </a:solidFill>
+                <a:latin typeface="Microsoft JhengHei"/>
+                <a:ea typeface="Microsoft JhengHei"/>
+                <a:cs typeface="Microsoft JhengHei"/>
+              </a:rPr>
+              <a:t> dataset fitness </a:t>
+            </a:r>
+            <a:r>
+              <a:rPr sz="2100" b="1" dirty="0" err="1">
+                <a:solidFill>
+                  <a:srgbClr val="005EA8"/>
+                </a:solidFill>
+                <a:latin typeface="Microsoft JhengHei"/>
+                <a:ea typeface="Microsoft JhengHei"/>
+                <a:cs typeface="Microsoft JhengHei"/>
+              </a:rPr>
+              <a:t>結論</a:t>
+            </a:r>
+            <a:r>
+              <a:rPr sz="2100" b="1" dirty="0">
+                <a:solidFill>
+                  <a:srgbClr val="005EA8"/>
+                </a:solidFill>
+                <a:latin typeface="Microsoft JhengHei"/>
+                <a:ea typeface="Microsoft JhengHei"/>
+                <a:cs typeface="Microsoft JhengHei"/>
+              </a:rPr>
+              <a:t>。</a:t>
             </a:r>
           </a:p>
         </p:txBody>
